--- a/CuraCascade_Presentation_V2_25Slides.pptx
+++ b/CuraCascade_Presentation_V2_25Slides.pptx
@@ -6554,9 +6554,6 @@
 
 <file path=ppt/slides/slide1.xml><?xml version="1.0" encoding="utf-8"?>
 <p:sld xmlns:a="http://schemas.openxmlformats.org/drawingml/2006/main" xmlns:p="http://schemas.openxmlformats.org/presentationml/2006/main" xmlns:r="http://schemas.openxmlformats.org/officeDocument/2006/relationships">
-  <p:transition spd="med">
-    <p:fade/>
-  </p:transition>
   <p:cSld>
     <p:bg>
       <p:bgPr>
@@ -7060,14 +7057,14 @@
   <p:clrMapOvr>
     <a:masterClrMapping/>
   </p:clrMapOvr>
+  <p:transition spd="med">
+    <p:fade/>
+  </p:transition>
 </p:sld>
 </file>
 
 <file path=ppt/slides/slide10.xml><?xml version="1.0" encoding="utf-8"?>
 <p:sld xmlns:a="http://schemas.openxmlformats.org/drawingml/2006/main" xmlns:p="http://schemas.openxmlformats.org/presentationml/2006/main" xmlns:r="http://schemas.openxmlformats.org/officeDocument/2006/relationships">
-  <p:transition spd="med">
-    <p:fade/>
-  </p:transition>
   <p:cSld>
     <p:bg>
       <p:bgPr>
@@ -7607,14 +7604,14 @@
   <p:clrMapOvr>
     <a:masterClrMapping/>
   </p:clrMapOvr>
+  <p:transition spd="med">
+    <p:fade/>
+  </p:transition>
 </p:sld>
 </file>
 
 <file path=ppt/slides/slide11.xml><?xml version="1.0" encoding="utf-8"?>
 <p:sld xmlns:a="http://schemas.openxmlformats.org/drawingml/2006/main" xmlns:p="http://schemas.openxmlformats.org/presentationml/2006/main" xmlns:r="http://schemas.openxmlformats.org/officeDocument/2006/relationships">
-  <p:transition spd="med">
-    <p:fade/>
-  </p:transition>
   <p:cSld>
     <p:bg>
       <p:bgPr>
@@ -8454,14 +8451,14 @@
   <p:clrMapOvr>
     <a:masterClrMapping/>
   </p:clrMapOvr>
+  <p:transition spd="med">
+    <p:fade/>
+  </p:transition>
 </p:sld>
 </file>
 
 <file path=ppt/slides/slide12.xml><?xml version="1.0" encoding="utf-8"?>
 <p:sld xmlns:a="http://schemas.openxmlformats.org/drawingml/2006/main" xmlns:p="http://schemas.openxmlformats.org/presentationml/2006/main" xmlns:r="http://schemas.openxmlformats.org/officeDocument/2006/relationships">
-  <p:transition spd="med">
-    <p:fade/>
-  </p:transition>
   <p:cSld>
     <p:bg>
       <p:bgPr>
@@ -8883,14 +8880,14 @@
   <p:clrMapOvr>
     <a:masterClrMapping/>
   </p:clrMapOvr>
+  <p:transition spd="med">
+    <p:fade/>
+  </p:transition>
 </p:sld>
 </file>
 
 <file path=ppt/slides/slide13.xml><?xml version="1.0" encoding="utf-8"?>
 <p:sld xmlns:a="http://schemas.openxmlformats.org/drawingml/2006/main" xmlns:p="http://schemas.openxmlformats.org/presentationml/2006/main" xmlns:r="http://schemas.openxmlformats.org/officeDocument/2006/relationships">
-  <p:transition spd="med">
-    <p:fade/>
-  </p:transition>
   <p:cSld>
     <p:bg>
       <p:bgPr>
@@ -9339,14 +9336,14 @@
   <p:clrMapOvr>
     <a:masterClrMapping/>
   </p:clrMapOvr>
+  <p:transition spd="med">
+    <p:fade/>
+  </p:transition>
 </p:sld>
 </file>
 
 <file path=ppt/slides/slide14.xml><?xml version="1.0" encoding="utf-8"?>
 <p:sld xmlns:a="http://schemas.openxmlformats.org/drawingml/2006/main" xmlns:p="http://schemas.openxmlformats.org/presentationml/2006/main" xmlns:r="http://schemas.openxmlformats.org/officeDocument/2006/relationships">
-  <p:transition spd="med">
-    <p:fade/>
-  </p:transition>
   <p:cSld>
     <p:bg>
       <p:bgPr>
@@ -9949,14 +9946,14 @@
   <p:clrMapOvr>
     <a:masterClrMapping/>
   </p:clrMapOvr>
+  <p:transition spd="med">
+    <p:fade/>
+  </p:transition>
 </p:sld>
 </file>
 
 <file path=ppt/slides/slide15.xml><?xml version="1.0" encoding="utf-8"?>
 <p:sld xmlns:a="http://schemas.openxmlformats.org/drawingml/2006/main" xmlns:p="http://schemas.openxmlformats.org/presentationml/2006/main" xmlns:r="http://schemas.openxmlformats.org/officeDocument/2006/relationships">
-  <p:transition spd="med">
-    <p:fade/>
-  </p:transition>
   <p:cSld>
     <p:bg>
       <p:bgPr>
@@ -10701,14 +10698,14 @@
   <p:clrMapOvr>
     <a:masterClrMapping/>
   </p:clrMapOvr>
+  <p:transition spd="med">
+    <p:fade/>
+  </p:transition>
 </p:sld>
 </file>
 
 <file path=ppt/slides/slide16.xml><?xml version="1.0" encoding="utf-8"?>
 <p:sld xmlns:a="http://schemas.openxmlformats.org/drawingml/2006/main" xmlns:p="http://schemas.openxmlformats.org/presentationml/2006/main" xmlns:r="http://schemas.openxmlformats.org/officeDocument/2006/relationships">
-  <p:transition spd="med">
-    <p:fade/>
-  </p:transition>
   <p:cSld>
     <p:bg>
       <p:bgPr>
@@ -11157,14 +11154,14 @@
   <p:clrMapOvr>
     <a:masterClrMapping/>
   </p:clrMapOvr>
+  <p:transition spd="med">
+    <p:fade/>
+  </p:transition>
 </p:sld>
 </file>
 
 <file path=ppt/slides/slide17.xml><?xml version="1.0" encoding="utf-8"?>
 <p:sld xmlns:a="http://schemas.openxmlformats.org/drawingml/2006/main" xmlns:p="http://schemas.openxmlformats.org/presentationml/2006/main" xmlns:r="http://schemas.openxmlformats.org/officeDocument/2006/relationships">
-  <p:transition spd="med">
-    <p:fade/>
-  </p:transition>
   <p:cSld>
     <p:bg>
       <p:bgPr>
@@ -11586,14 +11583,14 @@
   <p:clrMapOvr>
     <a:masterClrMapping/>
   </p:clrMapOvr>
+  <p:transition spd="med">
+    <p:fade/>
+  </p:transition>
 </p:sld>
 </file>
 
 <file path=ppt/slides/slide18.xml><?xml version="1.0" encoding="utf-8"?>
 <p:sld xmlns:a="http://schemas.openxmlformats.org/drawingml/2006/main" xmlns:p="http://schemas.openxmlformats.org/presentationml/2006/main" xmlns:r="http://schemas.openxmlformats.org/officeDocument/2006/relationships">
-  <p:transition spd="med">
-    <p:fade/>
-  </p:transition>
   <p:cSld>
     <p:bg>
       <p:bgPr>
@@ -12015,14 +12012,14 @@
   <p:clrMapOvr>
     <a:masterClrMapping/>
   </p:clrMapOvr>
+  <p:transition spd="med">
+    <p:fade/>
+  </p:transition>
 </p:sld>
 </file>
 
 <file path=ppt/slides/slide19.xml><?xml version="1.0" encoding="utf-8"?>
 <p:sld xmlns:a="http://schemas.openxmlformats.org/drawingml/2006/main" xmlns:p="http://schemas.openxmlformats.org/presentationml/2006/main" xmlns:r="http://schemas.openxmlformats.org/officeDocument/2006/relationships">
-  <p:transition spd="med">
-    <p:fade/>
-  </p:transition>
   <p:cSld>
     <p:bg>
       <p:bgPr>
@@ -12617,14 +12614,14 @@
   <p:clrMapOvr>
     <a:masterClrMapping/>
   </p:clrMapOvr>
+  <p:transition spd="med">
+    <p:fade/>
+  </p:transition>
 </p:sld>
 </file>
 
 <file path=ppt/slides/slide2.xml><?xml version="1.0" encoding="utf-8"?>
 <p:sld xmlns:a="http://schemas.openxmlformats.org/drawingml/2006/main" xmlns:p="http://schemas.openxmlformats.org/presentationml/2006/main" xmlns:r="http://schemas.openxmlformats.org/officeDocument/2006/relationships">
-  <p:transition spd="med">
-    <p:fade/>
-  </p:transition>
   <p:cSld>
     <p:bg>
       <p:bgPr>
@@ -13574,14 +13571,14 @@
   <p:clrMapOvr>
     <a:masterClrMapping/>
   </p:clrMapOvr>
+  <p:transition spd="med">
+    <p:fade/>
+  </p:transition>
 </p:sld>
 </file>
 
 <file path=ppt/slides/slide20.xml><?xml version="1.0" encoding="utf-8"?>
 <p:sld xmlns:a="http://schemas.openxmlformats.org/drawingml/2006/main" xmlns:p="http://schemas.openxmlformats.org/presentationml/2006/main" xmlns:r="http://schemas.openxmlformats.org/officeDocument/2006/relationships">
-  <p:transition spd="med">
-    <p:fade/>
-  </p:transition>
   <p:cSld>
     <p:bg>
       <p:bgPr>
@@ -14121,14 +14118,14 @@
   <p:clrMapOvr>
     <a:masterClrMapping/>
   </p:clrMapOvr>
+  <p:transition spd="med">
+    <p:fade/>
+  </p:transition>
 </p:sld>
 </file>
 
 <file path=ppt/slides/slide21.xml><?xml version="1.0" encoding="utf-8"?>
 <p:sld xmlns:a="http://schemas.openxmlformats.org/drawingml/2006/main" xmlns:p="http://schemas.openxmlformats.org/presentationml/2006/main" xmlns:r="http://schemas.openxmlformats.org/officeDocument/2006/relationships">
-  <p:transition spd="med">
-    <p:fade/>
-  </p:transition>
   <p:cSld>
     <p:bg>
       <p:bgPr>
@@ -15164,14 +15161,14 @@
   <p:clrMapOvr>
     <a:masterClrMapping/>
   </p:clrMapOvr>
+  <p:transition spd="med">
+    <p:fade/>
+  </p:transition>
 </p:sld>
 </file>
 
 <file path=ppt/slides/slide22.xml><?xml version="1.0" encoding="utf-8"?>
 <p:sld xmlns:a="http://schemas.openxmlformats.org/drawingml/2006/main" xmlns:p="http://schemas.openxmlformats.org/presentationml/2006/main" xmlns:r="http://schemas.openxmlformats.org/officeDocument/2006/relationships">
-  <p:transition spd="med">
-    <p:fade/>
-  </p:transition>
   <p:cSld>
     <p:bg>
       <p:bgPr>
@@ -15711,14 +15708,14 @@
   <p:clrMapOvr>
     <a:masterClrMapping/>
   </p:clrMapOvr>
+  <p:transition spd="med">
+    <p:fade/>
+  </p:transition>
 </p:sld>
 </file>
 
 <file path=ppt/slides/slide23.xml><?xml version="1.0" encoding="utf-8"?>
 <p:sld xmlns:a="http://schemas.openxmlformats.org/drawingml/2006/main" xmlns:p="http://schemas.openxmlformats.org/presentationml/2006/main" xmlns:r="http://schemas.openxmlformats.org/officeDocument/2006/relationships">
-  <p:transition spd="med">
-    <p:fade/>
-  </p:transition>
   <p:cSld>
     <p:bg>
       <p:bgPr>
@@ -16277,14 +16274,14 @@
   <p:clrMapOvr>
     <a:masterClrMapping/>
   </p:clrMapOvr>
+  <p:transition spd="med">
+    <p:fade/>
+  </p:transition>
 </p:sld>
 </file>
 
 <file path=ppt/slides/slide24.xml><?xml version="1.0" encoding="utf-8"?>
 <p:sld xmlns:a="http://schemas.openxmlformats.org/drawingml/2006/main" xmlns:p="http://schemas.openxmlformats.org/presentationml/2006/main" xmlns:r="http://schemas.openxmlformats.org/officeDocument/2006/relationships">
-  <p:transition spd="med">
-    <p:fade/>
-  </p:transition>
   <p:cSld>
     <p:bg>
       <p:bgPr>
@@ -17074,14 +17071,14 @@
   <p:clrMapOvr>
     <a:masterClrMapping/>
   </p:clrMapOvr>
+  <p:transition spd="med">
+    <p:fade/>
+  </p:transition>
 </p:sld>
 </file>
 
 <file path=ppt/slides/slide25.xml><?xml version="1.0" encoding="utf-8"?>
 <p:sld xmlns:a="http://schemas.openxmlformats.org/drawingml/2006/main" xmlns:p="http://schemas.openxmlformats.org/presentationml/2006/main" xmlns:r="http://schemas.openxmlformats.org/officeDocument/2006/relationships">
-  <p:transition spd="med">
-    <p:fade/>
-  </p:transition>
   <p:cSld>
     <p:bg>
       <p:bgPr>
@@ -17700,14 +17697,14 @@
   <p:clrMapOvr>
     <a:masterClrMapping/>
   </p:clrMapOvr>
+  <p:transition spd="med">
+    <p:fade/>
+  </p:transition>
 </p:sld>
 </file>
 
 <file path=ppt/slides/slide3.xml><?xml version="1.0" encoding="utf-8"?>
 <p:sld xmlns:a="http://schemas.openxmlformats.org/drawingml/2006/main" xmlns:p="http://schemas.openxmlformats.org/presentationml/2006/main" xmlns:r="http://schemas.openxmlformats.org/officeDocument/2006/relationships">
-  <p:transition spd="med">
-    <p:fade/>
-  </p:transition>
   <p:cSld>
     <p:bg>
       <p:bgPr>
@@ -18266,14 +18263,14 @@
   <p:clrMapOvr>
     <a:masterClrMapping/>
   </p:clrMapOvr>
+  <p:transition spd="med">
+    <p:fade/>
+  </p:transition>
 </p:sld>
 </file>
 
 <file path=ppt/slides/slide4.xml><?xml version="1.0" encoding="utf-8"?>
 <p:sld xmlns:a="http://schemas.openxmlformats.org/drawingml/2006/main" xmlns:p="http://schemas.openxmlformats.org/presentationml/2006/main" xmlns:r="http://schemas.openxmlformats.org/officeDocument/2006/relationships">
-  <p:transition spd="med">
-    <p:fade/>
-  </p:transition>
   <p:cSld>
     <p:bg>
       <p:bgPr>
@@ -19018,14 +19015,14 @@
   <p:clrMapOvr>
     <a:masterClrMapping/>
   </p:clrMapOvr>
+  <p:transition spd="med">
+    <p:fade/>
+  </p:transition>
 </p:sld>
 </file>
 
 <file path=ppt/slides/slide5.xml><?xml version="1.0" encoding="utf-8"?>
 <p:sld xmlns:a="http://schemas.openxmlformats.org/drawingml/2006/main" xmlns:p="http://schemas.openxmlformats.org/presentationml/2006/main" xmlns:r="http://schemas.openxmlformats.org/officeDocument/2006/relationships">
-  <p:transition spd="med">
-    <p:fade/>
-  </p:transition>
   <p:cSld>
     <p:bg>
       <p:bgPr>
@@ -19625,14 +19622,14 @@
   <p:clrMapOvr>
     <a:masterClrMapping/>
   </p:clrMapOvr>
+  <p:transition spd="med">
+    <p:fade/>
+  </p:transition>
 </p:sld>
 </file>
 
 <file path=ppt/slides/slide6.xml><?xml version="1.0" encoding="utf-8"?>
 <p:sld xmlns:a="http://schemas.openxmlformats.org/drawingml/2006/main" xmlns:p="http://schemas.openxmlformats.org/presentationml/2006/main" xmlns:r="http://schemas.openxmlformats.org/officeDocument/2006/relationships">
-  <p:transition spd="med">
-    <p:fade/>
-  </p:transition>
   <p:cSld>
     <p:bg>
       <p:bgPr>
@@ -20497,14 +20494,14 @@
   <p:clrMapOvr>
     <a:masterClrMapping/>
   </p:clrMapOvr>
+  <p:transition spd="med">
+    <p:fade/>
+  </p:transition>
 </p:sld>
 </file>
 
 <file path=ppt/slides/slide7.xml><?xml version="1.0" encoding="utf-8"?>
 <p:sld xmlns:a="http://schemas.openxmlformats.org/drawingml/2006/main" xmlns:p="http://schemas.openxmlformats.org/presentationml/2006/main" xmlns:r="http://schemas.openxmlformats.org/officeDocument/2006/relationships">
-  <p:transition spd="med">
-    <p:fade/>
-  </p:transition>
   <p:cSld>
     <p:bg>
       <p:bgPr>
@@ -21109,14 +21106,14 @@
   <p:clrMapOvr>
     <a:masterClrMapping/>
   </p:clrMapOvr>
+  <p:transition spd="med">
+    <p:fade/>
+  </p:transition>
 </p:sld>
 </file>
 
 <file path=ppt/slides/slide8.xml><?xml version="1.0" encoding="utf-8"?>
 <p:sld xmlns:a="http://schemas.openxmlformats.org/drawingml/2006/main" xmlns:p="http://schemas.openxmlformats.org/presentationml/2006/main" xmlns:r="http://schemas.openxmlformats.org/officeDocument/2006/relationships">
-  <p:transition spd="med">
-    <p:fade/>
-  </p:transition>
   <p:cSld>
     <p:bg>
       <p:bgPr>
@@ -22224,14 +22221,14 @@
   <p:clrMapOvr>
     <a:masterClrMapping/>
   </p:clrMapOvr>
+  <p:transition spd="med">
+    <p:fade/>
+  </p:transition>
 </p:sld>
 </file>
 
 <file path=ppt/slides/slide9.xml><?xml version="1.0" encoding="utf-8"?>
 <p:sld xmlns:a="http://schemas.openxmlformats.org/drawingml/2006/main" xmlns:p="http://schemas.openxmlformats.org/presentationml/2006/main" xmlns:r="http://schemas.openxmlformats.org/officeDocument/2006/relationships">
-  <p:transition spd="med">
-    <p:fade/>
-  </p:transition>
   <p:cSld>
     <p:bg>
       <p:bgPr>
@@ -22826,6 +22823,9 @@
   <p:clrMapOvr>
     <a:masterClrMapping/>
   </p:clrMapOvr>
+  <p:transition spd="med">
+    <p:fade/>
+  </p:transition>
 </p:sld>
 </file>
 
